--- a/bright-28-hl-buyers.pptx
+++ b/bright-28-hl-buyers.pptx
@@ -3088,20 +3088,12 @@
         <p:nvPr/>
       </p:nvGrpSpPr>
       <p:grpSpPr/>
-      <p:pic>
-        <p:nvPicPr>
-          <p:cNvPr id="2" name="Picture 1" descr="bright-28-hl-buyers.png"/>
-          <p:cNvPicPr>
-            <a:picLocks noChangeAspect="1"/>
-          </p:cNvPicPr>
+      <p:sp>
+        <p:nvSpPr>
+          <p:cNvPr id="2" name="Rectangle 1"/>
+          <p:cNvSpPr/>
           <p:nvPr/>
-        </p:nvPicPr>
-        <p:blipFill>
-          <a:blip r:embed="rId2"/>
-          <a:stretch>
-            <a:fillRect/>
-          </a:stretch>
-        </p:blipFill>
+        </p:nvSpPr>
         <p:spPr>
           <a:xfrm>
             <a:off x="0" y="0"/>
@@ -3110,8 +3102,291 @@
           <a:prstGeom prst="rect">
             <a:avLst/>
           </a:prstGeom>
+          <a:solidFill>
+            <a:srgbClr val="EDE7DD"/>
+          </a:solidFill>
+          <a:ln>
+            <a:noFill/>
+          </a:ln>
+          <a:effectLst/>
         </p:spPr>
-      </p:pic>
+        <p:style>
+          <a:lnRef idx="1">
+            <a:schemeClr val="accent1"/>
+          </a:lnRef>
+          <a:fillRef idx="3">
+            <a:schemeClr val="accent1"/>
+          </a:fillRef>
+          <a:effectRef idx="2">
+            <a:schemeClr val="accent1"/>
+          </a:effectRef>
+          <a:fontRef idx="minor">
+            <a:schemeClr val="lt1"/>
+          </a:fontRef>
+        </p:style>
+        <p:txBody>
+          <a:bodyPr rtlCol="0" anchor="ctr"/>
+          <a:lstStyle/>
+          <a:p>
+            <a:pPr algn="ctr"/>
+          </a:p>
+        </p:txBody>
+      </p:sp>
+      <p:sp>
+        <p:nvSpPr>
+          <p:cNvPr id="3" name="Rectangle 2"/>
+          <p:cNvSpPr/>
+          <p:nvPr/>
+        </p:nvSpPr>
+        <p:spPr>
+          <a:xfrm>
+            <a:off x="3714750" y="3228975"/>
+            <a:ext cx="2857500" cy="9525"/>
+          </a:xfrm>
+          <a:prstGeom prst="rect">
+            <a:avLst/>
+          </a:prstGeom>
+          <a:solidFill>
+            <a:srgbClr val="97A98C"/>
+          </a:solidFill>
+          <a:ln>
+            <a:noFill/>
+          </a:ln>
+          <a:effectLst/>
+        </p:spPr>
+        <p:style>
+          <a:lnRef idx="1">
+            <a:schemeClr val="accent1"/>
+          </a:lnRef>
+          <a:fillRef idx="3">
+            <a:schemeClr val="accent1"/>
+          </a:fillRef>
+          <a:effectRef idx="2">
+            <a:schemeClr val="accent1"/>
+          </a:effectRef>
+          <a:fontRef idx="minor">
+            <a:schemeClr val="lt1"/>
+          </a:fontRef>
+        </p:style>
+        <p:txBody>
+          <a:bodyPr rtlCol="0" anchor="ctr"/>
+          <a:lstStyle/>
+          <a:p>
+            <a:pPr algn="ctr"/>
+          </a:p>
+        </p:txBody>
+      </p:sp>
+      <p:sp>
+        <p:nvSpPr>
+          <p:cNvPr id="4" name="Rectangle 3"/>
+          <p:cNvSpPr/>
+          <p:nvPr/>
+        </p:nvSpPr>
+        <p:spPr>
+          <a:xfrm>
+            <a:off x="3714750" y="6076950"/>
+            <a:ext cx="2857500" cy="9525"/>
+          </a:xfrm>
+          <a:prstGeom prst="rect">
+            <a:avLst/>
+          </a:prstGeom>
+          <a:solidFill>
+            <a:srgbClr val="97A98C"/>
+          </a:solidFill>
+          <a:ln>
+            <a:noFill/>
+          </a:ln>
+          <a:effectLst/>
+        </p:spPr>
+        <p:style>
+          <a:lnRef idx="1">
+            <a:schemeClr val="accent1"/>
+          </a:lnRef>
+          <a:fillRef idx="3">
+            <a:schemeClr val="accent1"/>
+          </a:fillRef>
+          <a:effectRef idx="2">
+            <a:schemeClr val="accent1"/>
+          </a:effectRef>
+          <a:fontRef idx="minor">
+            <a:schemeClr val="lt1"/>
+          </a:fontRef>
+        </p:style>
+        <p:txBody>
+          <a:bodyPr rtlCol="0" anchor="ctr"/>
+          <a:lstStyle/>
+          <a:p>
+            <a:pPr algn="ctr"/>
+          </a:p>
+        </p:txBody>
+      </p:sp>
+      <p:sp>
+        <p:nvSpPr>
+          <p:cNvPr id="5" name="Rectangle 4"/>
+          <p:cNvSpPr/>
+          <p:nvPr/>
+        </p:nvSpPr>
+        <p:spPr>
+          <a:xfrm>
+            <a:off x="3714750" y="3228975"/>
+            <a:ext cx="9525" cy="2857500"/>
+          </a:xfrm>
+          <a:prstGeom prst="rect">
+            <a:avLst/>
+          </a:prstGeom>
+          <a:solidFill>
+            <a:srgbClr val="97A98C"/>
+          </a:solidFill>
+          <a:ln>
+            <a:noFill/>
+          </a:ln>
+          <a:effectLst/>
+        </p:spPr>
+        <p:style>
+          <a:lnRef idx="1">
+            <a:schemeClr val="accent1"/>
+          </a:lnRef>
+          <a:fillRef idx="3">
+            <a:schemeClr val="accent1"/>
+          </a:fillRef>
+          <a:effectRef idx="2">
+            <a:schemeClr val="accent1"/>
+          </a:effectRef>
+          <a:fontRef idx="minor">
+            <a:schemeClr val="lt1"/>
+          </a:fontRef>
+        </p:style>
+        <p:txBody>
+          <a:bodyPr rtlCol="0" anchor="ctr"/>
+          <a:lstStyle/>
+          <a:p>
+            <a:pPr algn="ctr"/>
+          </a:p>
+        </p:txBody>
+      </p:sp>
+      <p:sp>
+        <p:nvSpPr>
+          <p:cNvPr id="6" name="Rectangle 5"/>
+          <p:cNvSpPr/>
+          <p:nvPr/>
+        </p:nvSpPr>
+        <p:spPr>
+          <a:xfrm>
+            <a:off x="6562725" y="3228975"/>
+            <a:ext cx="9525" cy="2857500"/>
+          </a:xfrm>
+          <a:prstGeom prst="rect">
+            <a:avLst/>
+          </a:prstGeom>
+          <a:solidFill>
+            <a:srgbClr val="97A98C"/>
+          </a:solidFill>
+          <a:ln>
+            <a:noFill/>
+          </a:ln>
+          <a:effectLst/>
+        </p:spPr>
+        <p:style>
+          <a:lnRef idx="1">
+            <a:schemeClr val="accent1"/>
+          </a:lnRef>
+          <a:fillRef idx="3">
+            <a:schemeClr val="accent1"/>
+          </a:fillRef>
+          <a:effectRef idx="2">
+            <a:schemeClr val="accent1"/>
+          </a:effectRef>
+          <a:fontRef idx="minor">
+            <a:schemeClr val="lt1"/>
+          </a:fontRef>
+        </p:style>
+        <p:txBody>
+          <a:bodyPr rtlCol="0" anchor="ctr"/>
+          <a:lstStyle/>
+          <a:p>
+            <a:pPr algn="ctr"/>
+          </a:p>
+        </p:txBody>
+      </p:sp>
+      <p:sp>
+        <p:nvSpPr>
+          <p:cNvPr id="7" name="Rectangle 6"/>
+          <p:cNvSpPr/>
+          <p:nvPr/>
+        </p:nvSpPr>
+        <p:spPr>
+          <a:xfrm>
+            <a:off x="4905375" y="7048500"/>
+            <a:ext cx="476250" cy="9525"/>
+          </a:xfrm>
+          <a:prstGeom prst="rect">
+            <a:avLst/>
+          </a:prstGeom>
+          <a:solidFill>
+            <a:srgbClr val="E6D2CB"/>
+          </a:solidFill>
+          <a:ln>
+            <a:noFill/>
+          </a:ln>
+          <a:effectLst/>
+        </p:spPr>
+        <p:style>
+          <a:lnRef idx="1">
+            <a:schemeClr val="accent1"/>
+          </a:lnRef>
+          <a:fillRef idx="3">
+            <a:schemeClr val="accent1"/>
+          </a:fillRef>
+          <a:effectRef idx="2">
+            <a:schemeClr val="accent1"/>
+          </a:effectRef>
+          <a:fontRef idx="minor">
+            <a:schemeClr val="lt1"/>
+          </a:fontRef>
+        </p:style>
+        <p:txBody>
+          <a:bodyPr rtlCol="0" anchor="ctr"/>
+          <a:lstStyle/>
+          <a:p>
+            <a:pPr algn="ctr"/>
+          </a:p>
+        </p:txBody>
+      </p:sp>
+      <p:sp>
+        <p:nvSpPr>
+          <p:cNvPr id="8" name="TextBox 7"/>
+          <p:cNvSpPr txBox="1"/>
+          <p:nvPr/>
+        </p:nvSpPr>
+        <p:spPr>
+          <a:xfrm>
+            <a:off x="4504283" y="6562725"/>
+            <a:ext cx="2426256" cy="314325"/>
+          </a:xfrm>
+          <a:prstGeom prst="rect">
+            <a:avLst/>
+          </a:prstGeom>
+          <a:noFill/>
+        </p:spPr>
+        <p:txBody>
+          <a:bodyPr wrap="none" anchor="t" lIns="0" rIns="0" tIns="0" bIns="0"/>
+          <a:lstStyle/>
+          <a:p>
+            <a:pPr algn="l"/>
+            <a:r>
+              <a:rPr sz="1650" i="0" b="0" spc="693">
+                <a:solidFill>
+                  <a:srgbClr val="33322E"/>
+                </a:solidFill>
+                <a:latin typeface="Poppins"/>
+                <a:ea typeface="Poppins"/>
+                <a:cs typeface="Poppins"/>
+              </a:rPr>
+              <a:t>BUYERS</a:t>
+            </a:r>
+          </a:p>
+        </p:txBody>
+      </p:sp>
     </p:spTree>
   </p:cSld>
   <p:clrMapOvr>

--- a/bright-28-hl-buyers.pptx
+++ b/bright-28-hl-buyers.pptx
@@ -3134,23 +3134,23 @@
       </p:sp>
       <p:sp>
         <p:nvSpPr>
-          <p:cNvPr id="3" name="Rectangle 2"/>
+          <p:cNvPr id="3" name="Oval 2"/>
           <p:cNvSpPr/>
           <p:nvPr/>
         </p:nvSpPr>
         <p:spPr>
           <a:xfrm>
             <a:off x="3714750" y="3228975"/>
-            <a:ext cx="2857500" cy="9525"/>
+            <a:ext cx="2857500" cy="2857500"/>
           </a:xfrm>
-          <a:prstGeom prst="rect">
+          <a:prstGeom prst="ellipse">
             <a:avLst/>
           </a:prstGeom>
-          <a:solidFill>
-            <a:srgbClr val="97A98C"/>
-          </a:solidFill>
-          <a:ln>
-            <a:noFill/>
+          <a:noFill/>
+          <a:ln w="9525">
+            <a:solidFill>
+              <a:srgbClr val="97A98C"/>
+            </a:solidFill>
           </a:ln>
           <a:effectLst/>
         </p:spPr>
@@ -3179,138 +3179,6 @@
       <p:sp>
         <p:nvSpPr>
           <p:cNvPr id="4" name="Rectangle 3"/>
-          <p:cNvSpPr/>
-          <p:nvPr/>
-        </p:nvSpPr>
-        <p:spPr>
-          <a:xfrm>
-            <a:off x="3714750" y="6076950"/>
-            <a:ext cx="2857500" cy="9525"/>
-          </a:xfrm>
-          <a:prstGeom prst="rect">
-            <a:avLst/>
-          </a:prstGeom>
-          <a:solidFill>
-            <a:srgbClr val="97A98C"/>
-          </a:solidFill>
-          <a:ln>
-            <a:noFill/>
-          </a:ln>
-          <a:effectLst/>
-        </p:spPr>
-        <p:style>
-          <a:lnRef idx="1">
-            <a:schemeClr val="accent1"/>
-          </a:lnRef>
-          <a:fillRef idx="3">
-            <a:schemeClr val="accent1"/>
-          </a:fillRef>
-          <a:effectRef idx="2">
-            <a:schemeClr val="accent1"/>
-          </a:effectRef>
-          <a:fontRef idx="minor">
-            <a:schemeClr val="lt1"/>
-          </a:fontRef>
-        </p:style>
-        <p:txBody>
-          <a:bodyPr rtlCol="0" anchor="ctr"/>
-          <a:lstStyle/>
-          <a:p>
-            <a:pPr algn="ctr"/>
-          </a:p>
-        </p:txBody>
-      </p:sp>
-      <p:sp>
-        <p:nvSpPr>
-          <p:cNvPr id="5" name="Rectangle 4"/>
-          <p:cNvSpPr/>
-          <p:nvPr/>
-        </p:nvSpPr>
-        <p:spPr>
-          <a:xfrm>
-            <a:off x="3714750" y="3228975"/>
-            <a:ext cx="9525" cy="2857500"/>
-          </a:xfrm>
-          <a:prstGeom prst="rect">
-            <a:avLst/>
-          </a:prstGeom>
-          <a:solidFill>
-            <a:srgbClr val="97A98C"/>
-          </a:solidFill>
-          <a:ln>
-            <a:noFill/>
-          </a:ln>
-          <a:effectLst/>
-        </p:spPr>
-        <p:style>
-          <a:lnRef idx="1">
-            <a:schemeClr val="accent1"/>
-          </a:lnRef>
-          <a:fillRef idx="3">
-            <a:schemeClr val="accent1"/>
-          </a:fillRef>
-          <a:effectRef idx="2">
-            <a:schemeClr val="accent1"/>
-          </a:effectRef>
-          <a:fontRef idx="minor">
-            <a:schemeClr val="lt1"/>
-          </a:fontRef>
-        </p:style>
-        <p:txBody>
-          <a:bodyPr rtlCol="0" anchor="ctr"/>
-          <a:lstStyle/>
-          <a:p>
-            <a:pPr algn="ctr"/>
-          </a:p>
-        </p:txBody>
-      </p:sp>
-      <p:sp>
-        <p:nvSpPr>
-          <p:cNvPr id="6" name="Rectangle 5"/>
-          <p:cNvSpPr/>
-          <p:nvPr/>
-        </p:nvSpPr>
-        <p:spPr>
-          <a:xfrm>
-            <a:off x="6562725" y="3228975"/>
-            <a:ext cx="9525" cy="2857500"/>
-          </a:xfrm>
-          <a:prstGeom prst="rect">
-            <a:avLst/>
-          </a:prstGeom>
-          <a:solidFill>
-            <a:srgbClr val="97A98C"/>
-          </a:solidFill>
-          <a:ln>
-            <a:noFill/>
-          </a:ln>
-          <a:effectLst/>
-        </p:spPr>
-        <p:style>
-          <a:lnRef idx="1">
-            <a:schemeClr val="accent1"/>
-          </a:lnRef>
-          <a:fillRef idx="3">
-            <a:schemeClr val="accent1"/>
-          </a:fillRef>
-          <a:effectRef idx="2">
-            <a:schemeClr val="accent1"/>
-          </a:effectRef>
-          <a:fontRef idx="minor">
-            <a:schemeClr val="lt1"/>
-          </a:fontRef>
-        </p:style>
-        <p:txBody>
-          <a:bodyPr rtlCol="0" anchor="ctr"/>
-          <a:lstStyle/>
-          <a:p>
-            <a:pPr algn="ctr"/>
-          </a:p>
-        </p:txBody>
-      </p:sp>
-      <p:sp>
-        <p:nvSpPr>
-          <p:cNvPr id="7" name="Rectangle 6"/>
           <p:cNvSpPr/>
           <p:nvPr/>
         </p:nvSpPr>
@@ -3354,7 +3222,7 @@
       </p:sp>
       <p:sp>
         <p:nvSpPr>
-          <p:cNvPr id="8" name="TextBox 7"/>
+          <p:cNvPr id="5" name="TextBox 4"/>
           <p:cNvSpPr txBox="1"/>
           <p:nvPr/>
         </p:nvSpPr>
@@ -3387,6 +3255,30 @@
           </a:p>
         </p:txBody>
       </p:sp>
+      <p:pic>
+        <p:nvPicPr>
+          <p:cNvPr id="6" name="Picture 5" descr="bright-28-hl-buyers_3.png"/>
+          <p:cNvPicPr>
+            <a:picLocks noChangeAspect="1"/>
+          </p:cNvPicPr>
+          <p:nvPr/>
+        </p:nvPicPr>
+        <p:blipFill>
+          <a:blip r:embed="rId2"/>
+          <a:stretch>
+            <a:fillRect/>
+          </a:stretch>
+        </p:blipFill>
+        <p:spPr>
+          <a:xfrm>
+            <a:off x="4429125" y="3943350"/>
+            <a:ext cx="1428750" cy="1428750"/>
+          </a:xfrm>
+          <a:prstGeom prst="rect">
+            <a:avLst/>
+          </a:prstGeom>
+        </p:spPr>
+      </p:pic>
     </p:spTree>
   </p:cSld>
   <p:clrMapOvr>
